--- a/media/exports/reports/2026-03/people-helped.pptx
+++ b/media/exports/reports/2026-03/people-helped.pptx
@@ -172,7 +172,7 @@
             <c:idx val="3"/>
             <c:spPr>
               <a:solidFill>
-                <a:srgbClr val="0E9F6E"/>
+                <a:srgbClr val="7D8790"/>
               </a:solidFill>
             </c:spPr>
           </c:dPt>
@@ -182,16 +182,16 @@
               <c:strCache>
                 <c:ptCount val="4"/>
                 <c:pt idx="0">
+                  <c:v>Youth outreach</c:v>
+                </c:pt>
+                <c:pt idx="1">
                   <c:v>Housing support</c:v>
                 </c:pt>
-                <c:pt idx="1">
+                <c:pt idx="2">
                   <c:v>Digital literacy</c:v>
                 </c:pt>
-                <c:pt idx="2">
+                <c:pt idx="3">
                   <c:v>Community meals</c:v>
-                </c:pt>
-                <c:pt idx="3">
-                  <c:v>Youth outreach</c:v>
                 </c:pt>
               </c:strCache>
             </c:strRef>
@@ -203,16 +203,16 @@
                 <c:formatCode>0.0"%";[Red](0.0"%")</c:formatCode>
                 <c:ptCount val="4"/>
                 <c:pt idx="0">
+                  <c:v>80.9</c:v>
+                </c:pt>
+                <c:pt idx="1">
                   <c:v>85.1</c:v>
                 </c:pt>
-                <c:pt idx="1">
-                  <c:v>86.4</c:v>
-                </c:pt>
                 <c:pt idx="2">
-                  <c:v>86.5</c:v>
+                  <c:v>85.1</c:v>
                 </c:pt>
                 <c:pt idx="3">
-                  <c:v>90.8</c:v>
+                  <c:v>88.6</c:v>
                 </c:pt>
               </c:numCache>
             </c:numRef>
@@ -276,7 +276,7 @@
       <c:valAx>
         <c:axId val="-2113994440"/>
         <c:scaling>
-          <c:max val="104.41999999999999"/>
+          <c:max val="103.49999999999999"/>
           <c:min val="0.0"/>
         </c:scaling>
         <c:delete/>
@@ -1049,7 +1049,7 @@
           <a:lstStyle/>
           <a:p>
             <a:r>
-              <a:t>How many people did we help this month, and how many couldn't we reach?. People helped, March: 412; Couldn't reach, March: 61; Share reached, March: 87.1%. 412 people were helped in March, and 61 came to a program but couldn't be helped: 87.1% reached (target 90.0%), against 90.4% in February. Housing support reached the smallest share: 85.1% (14 couldn't be helped). The main reason: program at capacity (27 people).</a:t>
+              <a:t>How many people did we help this month, and how many couldn't we reach?. People helped, March: 412; Couldn't reach, March: 69; Share reached, March: 85.7%. 412 people were helped in March, and 69 came to a program but couldn't be helped: 85.7% reached (target 90.0%), against 90.2% in February. Youth outreach reached the smallest share: 80.9% (21 couldn't be helped). The main reason: program at capacity (29 people).</a:t>
             </a:r>
           </a:p>
         </p:txBody>
@@ -4604,7 +4604,7 @@
                 </a:solidFill>
                 <a:latin typeface="Roboto"/>
               </a:rPr>
-              <a:t>Data retrieved 2pm, Tue 6 Oct 2026 · Generated 8 Oct 2026, 6:29pm · Sample data · Made with Python (python-pptx)</a:t>
+              <a:t>Data retrieved 2pm, Tue 6 Oct 2026 · Generated 8 Oct 2026, 11:41pm · Sample data · Made with Python (python-pptx)</a:t>
             </a:r>
           </a:p>
         </p:txBody>
@@ -5116,7 +5116,7 @@
                 </a:solidFill>
                 <a:latin typeface="Roboto"/>
               </a:rPr>
-              <a:t>61</a:t>
+              <a:t>69</a:t>
             </a:r>
           </a:p>
         </p:txBody>
@@ -5155,7 +5155,7 @@
                 </a:solidFill>
                 <a:latin typeface="Roboto"/>
               </a:rPr>
-              <a:t>February 42</a:t>
+              <a:t>February 43</a:t>
             </a:r>
           </a:p>
         </p:txBody>
@@ -5278,11 +5278,11 @@
             <a:r>
               <a:rPr sz="2200" b="1">
                 <a:solidFill>
-                  <a:srgbClr val="8A6D3B"/>
+                  <a:srgbClr val="B42318"/>
                 </a:solidFill>
                 <a:latin typeface="Roboto"/>
               </a:rPr>
-              <a:t>87.1%</a:t>
+              <a:t>85.7%</a:t>
             </a:r>
           </a:p>
         </p:txBody>
@@ -5352,7 +5352,7 @@
         </p:nvCxnSpPr>
         <p:spPr>
           <a:xfrm>
-            <a:off x="9477956" y="2611587"/>
+            <a:off x="9528067" y="2611587"/>
             <a:ext cx="0" cy="1995586"/>
           </a:xfrm>
           <a:prstGeom prst="line">
@@ -5388,7 +5388,7 @@
         </p:nvSpPr>
         <p:spPr>
           <a:xfrm>
-            <a:off x="8380676" y="4607173"/>
+            <a:off x="8430787" y="4607173"/>
             <a:ext cx="2194560" cy="237744"/>
           </a:xfrm>
           <a:prstGeom prst="rect">
@@ -5541,7 +5541,7 @@
                 </a:solidFill>
                 <a:latin typeface="Roboto"/>
               </a:rPr>
-              <a:t>412 people were helped in March, and 61 came to a program but couldn't be helped: 87.1% reached (target 90.0%), against 90.4% in February.</a:t>
+              <a:t>412 people were helped in March, and 69 came to a program but couldn't be helped: 85.7% reached (target 90.0%), against 90.2% in February.</a:t>
             </a:r>
           </a:p>
         </p:txBody>
@@ -5668,7 +5668,7 @@
                 </a:solidFill>
                 <a:latin typeface="Roboto"/>
               </a:rPr>
-              <a:t>Housing support reached the smallest share: 85.1% (14 couldn't be helped). The main reason: program at capacity (27 people).</a:t>
+              <a:t>Youth outreach reached the smallest share: 80.9% (21 couldn't be helped). The main reason: program at capacity (29 people).</a:t>
             </a:r>
           </a:p>
         </p:txBody>
@@ -5746,7 +5746,7 @@
                 </a:solidFill>
                 <a:latin typeface="Roboto"/>
               </a:rPr>
-              <a:t>Data retrieved 2pm, Tue 6 Oct 2026 · Generated 8 Oct 2026, 6:29pm · Sample data · Made with Python (python-pptx)</a:t>
+              <a:t>Data retrieved 2pm, Tue 6 Oct 2026 · Generated 8 Oct 2026, 11:41pm · Sample data · Made with Python (python-pptx)</a:t>
             </a:r>
           </a:p>
         </p:txBody>
@@ -6061,7 +6061,7 @@
                 </a:solidFill>
                 <a:latin typeface="Roboto"/>
               </a:rPr>
-              <a:t>Data retrieved 2pm, Tue 6 Oct 2026 · Generated 8 Oct 2026, 6:29pm · Sample data · Made with Python (python-pptx)</a:t>
+              <a:t>Data retrieved 2pm, Tue 6 Oct 2026 · Generated 8 Oct 2026, 11:41pm · Sample data · Made with Python (python-pptx)</a:t>
             </a:r>
           </a:p>
         </p:txBody>
@@ -6369,7 +6369,7 @@
                           </a:solidFill>
                           <a:latin typeface="Roboto"/>
                         </a:rPr>
-                        <a:t>27</a:t>
+                        <a:t>29</a:t>
                       </a:r>
                     </a:p>
                   </a:txBody>
@@ -6425,7 +6425,7 @@
                           </a:solidFill>
                           <a:latin typeface="Roboto"/>
                         </a:rPr>
-                        <a:t>15</a:t>
+                        <a:t>16</a:t>
                       </a:r>
                     </a:p>
                   </a:txBody>
@@ -6481,7 +6481,7 @@
                           </a:solidFill>
                           <a:latin typeface="Roboto"/>
                         </a:rPr>
-                        <a:t>12</a:t>
+                        <a:t>11</a:t>
                       </a:r>
                     </a:p>
                   </a:txBody>
@@ -6537,7 +6537,7 @@
                           </a:solidFill>
                           <a:latin typeface="Roboto"/>
                         </a:rPr>
-                        <a:t>5</a:t>
+                        <a:t>9</a:t>
                       </a:r>
                     </a:p>
                   </a:txBody>
@@ -6593,7 +6593,7 @@
                           </a:solidFill>
                           <a:latin typeface="Roboto"/>
                         </a:rPr>
-                        <a:t>2</a:t>
+                        <a:t>4</a:t>
                       </a:r>
                     </a:p>
                   </a:txBody>
@@ -6681,7 +6681,7 @@
                 </a:solidFill>
                 <a:latin typeface="Roboto"/>
               </a:rPr>
-              <a:t>Data retrieved 2pm, Tue 6 Oct 2026 · Generated 8 Oct 2026, 6:29pm · Sample data · Made with Python (python-pptx)</a:t>
+              <a:t>Data retrieved 2pm, Tue 6 Oct 2026 · Generated 8 Oct 2026, 11:41pm · Sample data · Made with Python (python-pptx)</a:t>
             </a:r>
           </a:p>
         </p:txBody>

--- a/media/exports/reports/2026-03/people-helped.pptx
+++ b/media/exports/reports/2026-03/people-helped.pptx
@@ -979,7 +979,7 @@
           <a:lstStyle/>
           <a:p>
             <a:r>
-              <a:t>How many people did we help this month, and how many couldn't we reach?. Sample Community Services Ltd. Period: March 2026. People helped by each program, day by day, and the people who came to a program but couldn't be helped (and why). People helped are counted against each program's own grant spend.</a:t>
+              <a:t>How many people did we help this month, and how many couldn't we reach?. Sample Community Services Ltd. Period: March 2026. In short: 412 people helped in March; 69 couldn't be reached (85.7% reached, target 90.0%). People helped by each program, day by day, and the people who came to a program but couldn't be helped (and why). People helped are counted against each program's own grant spend.</a:t>
             </a:r>
           </a:p>
         </p:txBody>
@@ -4414,7 +4414,7 @@
         <p:spPr>
           <a:xfrm>
             <a:off x="457200" y="3703320"/>
-            <a:ext cx="11277295" cy="535940"/>
+            <a:ext cx="11277295" cy="758190"/>
           </a:xfrm>
           <a:prstGeom prst="rect">
             <a:avLst/>
@@ -4439,7 +4439,7 @@
                 </a:solidFill>
                 <a:latin typeface="Roboto"/>
               </a:rPr>
-              <a:t>Period: March 2026. People helped by each program, day by day, and the people who came to a program but couldn't be helped (and why). People helped are counted against each program's own grant spend.</a:t>
+              <a:t>Period: March 2026. In short: 412 people helped in March; 69 couldn't be reached (85.7% reached, target 90.0%). People helped by each program, day by day, and the people who came to a program but couldn't be helped (and why). People helped are counted against each program's own grant spend.</a:t>
             </a:r>
           </a:p>
         </p:txBody>
@@ -4452,7 +4452,7 @@
         </p:nvSpPr>
         <p:spPr>
           <a:xfrm>
-            <a:off x="457200" y="4330700"/>
+            <a:off x="457200" y="4552950"/>
             <a:ext cx="11277295" cy="1097280"/>
           </a:xfrm>
           <a:prstGeom prst="rect">
@@ -4604,7 +4604,7 @@
                 </a:solidFill>
                 <a:latin typeface="Roboto"/>
               </a:rPr>
-              <a:t>Data retrieved 2pm, Tue 6 Oct 2026 · Generated 8 Oct 2026, 11:41pm · Sample data · Made with Python (python-pptx)</a:t>
+              <a:t>Data retrieved 2pm, Tue 6 Oct 2026 · Generated 10 Oct 2026, 9:55pm · Sample data · Made with Python (python-pptx)</a:t>
             </a:r>
           </a:p>
         </p:txBody>
@@ -5746,7 +5746,7 @@
                 </a:solidFill>
                 <a:latin typeface="Roboto"/>
               </a:rPr>
-              <a:t>Data retrieved 2pm, Tue 6 Oct 2026 · Generated 8 Oct 2026, 11:41pm · Sample data · Made with Python (python-pptx)</a:t>
+              <a:t>Data retrieved 2pm, Tue 6 Oct 2026 · Generated 10 Oct 2026, 9:55pm · Sample data · Made with Python (python-pptx)</a:t>
             </a:r>
           </a:p>
         </p:txBody>
@@ -6061,7 +6061,7 @@
                 </a:solidFill>
                 <a:latin typeface="Roboto"/>
               </a:rPr>
-              <a:t>Data retrieved 2pm, Tue 6 Oct 2026 · Generated 8 Oct 2026, 11:41pm · Sample data · Made with Python (python-pptx)</a:t>
+              <a:t>Data retrieved 2pm, Tue 6 Oct 2026 · Generated 10 Oct 2026, 9:55pm · Sample data · Made with Python (python-pptx)</a:t>
             </a:r>
           </a:p>
         </p:txBody>
@@ -6681,7 +6681,7 @@
                 </a:solidFill>
                 <a:latin typeface="Roboto"/>
               </a:rPr>
-              <a:t>Data retrieved 2pm, Tue 6 Oct 2026 · Generated 8 Oct 2026, 11:41pm · Sample data · Made with Python (python-pptx)</a:t>
+              <a:t>Data retrieved 2pm, Tue 6 Oct 2026 · Generated 10 Oct 2026, 9:55pm · Sample data · Made with Python (python-pptx)</a:t>
             </a:r>
           </a:p>
         </p:txBody>
